--- a/document/report/数据库系统课程设计_答辩PPT.pptx
+++ b/document/report/数据库系统课程设计_答辩PPT.pptx
@@ -16,7 +16,6 @@
     <p:sldId id="264" r:id="rId15"/>
     <p:sldId id="265" r:id="rId16"/>
     <p:sldId id="266" r:id="rId17"/>
-    <p:sldId id="267" r:id="rId18"/>
   </p:sldIdLst>
   <p:sldSz cx="12188952" cy="6858000" type="screen4x3"/>
   <p:notesSz cx="6858000" cy="9144000"/>
@@ -4968,882 +4967,6 @@
 </p:sld>
 </file>
 
-<file path=ppt/slides/slide12.xml><?xml version="1.0" encoding="utf-8"?>
-<p:sld xmlns:a="http://schemas.openxmlformats.org/drawingml/2006/main" xmlns:p="http://schemas.openxmlformats.org/presentationml/2006/main" xmlns:r="http://schemas.openxmlformats.org/officeDocument/2006/relationships">
-  <p:cSld>
-    <p:spTree>
-      <p:nvGrpSpPr>
-        <p:cNvPr id="1" name=""/>
-        <p:cNvGrpSpPr/>
-        <p:nvPr/>
-      </p:nvGrpSpPr>
-      <p:grpSpPr/>
-      <p:sp>
-        <p:nvSpPr>
-          <p:cNvPr id="2" name="Rectangle 1"/>
-          <p:cNvSpPr/>
-          <p:nvPr/>
-        </p:nvSpPr>
-        <p:spPr>
-          <a:xfrm>
-            <a:off x="365760" y="320040"/>
-            <a:ext cx="54864" cy="365760"/>
-          </a:xfrm>
-          <a:prstGeom prst="rect">
-            <a:avLst/>
-          </a:prstGeom>
-          <a:solidFill>
-            <a:srgbClr val="4CAF50"/>
-          </a:solidFill>
-          <a:ln>
-            <a:noFill/>
-          </a:ln>
-        </p:spPr>
-        <p:style>
-          <a:lnRef idx="1">
-            <a:schemeClr val="accent1"/>
-          </a:lnRef>
-          <a:fillRef idx="3">
-            <a:schemeClr val="accent1"/>
-          </a:fillRef>
-          <a:effectRef idx="2">
-            <a:schemeClr val="accent1"/>
-          </a:effectRef>
-          <a:fontRef idx="minor">
-            <a:schemeClr val="lt1"/>
-          </a:fontRef>
-        </p:style>
-        <p:txBody>
-          <a:bodyPr rtlCol="0" anchor="ctr"/>
-          <a:lstStyle/>
-          <a:p>
-            <a:pPr algn="ctr"/>
-          </a:p>
-        </p:txBody>
-      </p:sp>
-      <p:sp>
-        <p:nvSpPr>
-          <p:cNvPr id="3" name="TextBox 2"/>
-          <p:cNvSpPr txBox="1"/>
-          <p:nvPr/>
-        </p:nvSpPr>
-        <p:spPr>
-          <a:xfrm>
-            <a:off x="548640" y="274320"/>
-            <a:ext cx="5486400" cy="548640"/>
-          </a:xfrm>
-          <a:prstGeom prst="rect">
-            <a:avLst/>
-          </a:prstGeom>
-          <a:noFill/>
-        </p:spPr>
-        <p:txBody>
-          <a:bodyPr wrap="square">
-            <a:spAutoFit/>
-          </a:bodyPr>
-          <a:lstStyle/>
-          <a:p>
-            <a:pPr algn="l"/>
-            <a:r>
-              <a:rPr sz="2800" b="1">
-                <a:solidFill>
-                  <a:srgbClr val="1A5276"/>
-                </a:solidFill>
-                <a:latin typeface="Microsoft YaHei"/>
-              </a:rPr>
-              <a:t>📸  请在此处插入系统运行截图</a:t>
-            </a:r>
-          </a:p>
-        </p:txBody>
-      </p:sp>
-      <p:sp>
-        <p:nvSpPr>
-          <p:cNvPr id="4" name="Rectangle 3"/>
-          <p:cNvSpPr/>
-          <p:nvPr/>
-        </p:nvSpPr>
-        <p:spPr>
-          <a:xfrm>
-            <a:off x="457200" y="1005840"/>
-            <a:ext cx="5486400" cy="457200"/>
-          </a:xfrm>
-          <a:prstGeom prst="rect">
-            <a:avLst/>
-          </a:prstGeom>
-          <a:solidFill>
-            <a:srgbClr val="EBF5FB"/>
-          </a:solidFill>
-          <a:ln>
-            <a:noFill/>
-          </a:ln>
-        </p:spPr>
-        <p:style>
-          <a:lnRef idx="1">
-            <a:schemeClr val="accent1"/>
-          </a:lnRef>
-          <a:fillRef idx="3">
-            <a:schemeClr val="accent1"/>
-          </a:fillRef>
-          <a:effectRef idx="2">
-            <a:schemeClr val="accent1"/>
-          </a:effectRef>
-          <a:fontRef idx="minor">
-            <a:schemeClr val="lt1"/>
-          </a:fontRef>
-        </p:style>
-        <p:txBody>
-          <a:bodyPr rtlCol="0" anchor="ctr"/>
-          <a:lstStyle/>
-          <a:p>
-            <a:pPr algn="ctr"/>
-          </a:p>
-        </p:txBody>
-      </p:sp>
-      <p:sp>
-        <p:nvSpPr>
-          <p:cNvPr id="5" name="TextBox 4"/>
-          <p:cNvSpPr txBox="1"/>
-          <p:nvPr/>
-        </p:nvSpPr>
-        <p:spPr>
-          <a:xfrm>
-            <a:off x="640080" y="1069848"/>
-            <a:ext cx="5029200" cy="320040"/>
-          </a:xfrm>
-          <a:prstGeom prst="rect">
-            <a:avLst/>
-          </a:prstGeom>
-          <a:noFill/>
-        </p:spPr>
-        <p:txBody>
-          <a:bodyPr wrap="square">
-            <a:spAutoFit/>
-          </a:bodyPr>
-          <a:lstStyle/>
-          <a:p>
-            <a:pPr algn="l"/>
-            <a:r>
-              <a:rPr sz="1200" b="0">
-                <a:solidFill>
-                  <a:srgbClr val="2C3E50"/>
-                </a:solidFill>
-                <a:latin typeface="Microsoft YaHei"/>
-              </a:rPr>
-              <a:t>01. 登录页面（快速选择下拉）</a:t>
-            </a:r>
-          </a:p>
-        </p:txBody>
-      </p:sp>
-      <p:sp>
-        <p:nvSpPr>
-          <p:cNvPr id="6" name="Rectangle 5"/>
-          <p:cNvSpPr/>
-          <p:nvPr/>
-        </p:nvSpPr>
-        <p:spPr>
-          <a:xfrm>
-            <a:off x="6217920" y="1005840"/>
-            <a:ext cx="5486400" cy="457200"/>
-          </a:xfrm>
-          <a:prstGeom prst="rect">
-            <a:avLst/>
-          </a:prstGeom>
-          <a:solidFill>
-            <a:srgbClr val="EBF5FB"/>
-          </a:solidFill>
-          <a:ln>
-            <a:noFill/>
-          </a:ln>
-        </p:spPr>
-        <p:style>
-          <a:lnRef idx="1">
-            <a:schemeClr val="accent1"/>
-          </a:lnRef>
-          <a:fillRef idx="3">
-            <a:schemeClr val="accent1"/>
-          </a:fillRef>
-          <a:effectRef idx="2">
-            <a:schemeClr val="accent1"/>
-          </a:effectRef>
-          <a:fontRef idx="minor">
-            <a:schemeClr val="lt1"/>
-          </a:fontRef>
-        </p:style>
-        <p:txBody>
-          <a:bodyPr rtlCol="0" anchor="ctr"/>
-          <a:lstStyle/>
-          <a:p>
-            <a:pPr algn="ctr"/>
-          </a:p>
-        </p:txBody>
-      </p:sp>
-      <p:sp>
-        <p:nvSpPr>
-          <p:cNvPr id="7" name="TextBox 6"/>
-          <p:cNvSpPr txBox="1"/>
-          <p:nvPr/>
-        </p:nvSpPr>
-        <p:spPr>
-          <a:xfrm>
-            <a:off x="6400800" y="1069848"/>
-            <a:ext cx="5029200" cy="320040"/>
-          </a:xfrm>
-          <a:prstGeom prst="rect">
-            <a:avLst/>
-          </a:prstGeom>
-          <a:noFill/>
-        </p:spPr>
-        <p:txBody>
-          <a:bodyPr wrap="square">
-            <a:spAutoFit/>
-          </a:bodyPr>
-          <a:lstStyle/>
-          <a:p>
-            <a:pPr algn="l"/>
-            <a:r>
-              <a:rPr sz="1200" b="0">
-                <a:solidFill>
-                  <a:srgbClr val="2C3E50"/>
-                </a:solidFill>
-                <a:latin typeface="Microsoft YaHei"/>
-              </a:rPr>
-              <a:t>02. 数据概览（Plotly 饼图 + 柱状图）</a:t>
-            </a:r>
-          </a:p>
-        </p:txBody>
-      </p:sp>
-      <p:sp>
-        <p:nvSpPr>
-          <p:cNvPr id="8" name="Rectangle 7"/>
-          <p:cNvSpPr/>
-          <p:nvPr/>
-        </p:nvSpPr>
-        <p:spPr>
-          <a:xfrm>
-            <a:off x="457200" y="1600200"/>
-            <a:ext cx="5486400" cy="457200"/>
-          </a:xfrm>
-          <a:prstGeom prst="rect">
-            <a:avLst/>
-          </a:prstGeom>
-          <a:solidFill>
-            <a:srgbClr val="EBF5FB"/>
-          </a:solidFill>
-          <a:ln>
-            <a:noFill/>
-          </a:ln>
-        </p:spPr>
-        <p:style>
-          <a:lnRef idx="1">
-            <a:schemeClr val="accent1"/>
-          </a:lnRef>
-          <a:fillRef idx="3">
-            <a:schemeClr val="accent1"/>
-          </a:fillRef>
-          <a:effectRef idx="2">
-            <a:schemeClr val="accent1"/>
-          </a:effectRef>
-          <a:fontRef idx="minor">
-            <a:schemeClr val="lt1"/>
-          </a:fontRef>
-        </p:style>
-        <p:txBody>
-          <a:bodyPr rtlCol="0" anchor="ctr"/>
-          <a:lstStyle/>
-          <a:p>
-            <a:pPr algn="ctr"/>
-          </a:p>
-        </p:txBody>
-      </p:sp>
-      <p:sp>
-        <p:nvSpPr>
-          <p:cNvPr id="9" name="TextBox 8"/>
-          <p:cNvSpPr txBox="1"/>
-          <p:nvPr/>
-        </p:nvSpPr>
-        <p:spPr>
-          <a:xfrm>
-            <a:off x="640080" y="1664208"/>
-            <a:ext cx="5029200" cy="320040"/>
-          </a:xfrm>
-          <a:prstGeom prst="rect">
-            <a:avLst/>
-          </a:prstGeom>
-          <a:noFill/>
-        </p:spPr>
-        <p:txBody>
-          <a:bodyPr wrap="square">
-            <a:spAutoFit/>
-          </a:bodyPr>
-          <a:lstStyle/>
-          <a:p>
-            <a:pPr algn="l"/>
-            <a:r>
-              <a:rPr sz="1200" b="0">
-                <a:solidFill>
-                  <a:srgbClr val="2C3E50"/>
-                </a:solidFill>
-                <a:latin typeface="Microsoft YaHei"/>
-              </a:rPr>
-              <a:t>03. 班级管理（年级/专业下拉 + 自动生成班级名）</a:t>
-            </a:r>
-          </a:p>
-        </p:txBody>
-      </p:sp>
-      <p:sp>
-        <p:nvSpPr>
-          <p:cNvPr id="10" name="Rectangle 9"/>
-          <p:cNvSpPr/>
-          <p:nvPr/>
-        </p:nvSpPr>
-        <p:spPr>
-          <a:xfrm>
-            <a:off x="6217920" y="1600200"/>
-            <a:ext cx="5486400" cy="457200"/>
-          </a:xfrm>
-          <a:prstGeom prst="rect">
-            <a:avLst/>
-          </a:prstGeom>
-          <a:solidFill>
-            <a:srgbClr val="EBF5FB"/>
-          </a:solidFill>
-          <a:ln>
-            <a:noFill/>
-          </a:ln>
-        </p:spPr>
-        <p:style>
-          <a:lnRef idx="1">
-            <a:schemeClr val="accent1"/>
-          </a:lnRef>
-          <a:fillRef idx="3">
-            <a:schemeClr val="accent1"/>
-          </a:fillRef>
-          <a:effectRef idx="2">
-            <a:schemeClr val="accent1"/>
-          </a:effectRef>
-          <a:fontRef idx="minor">
-            <a:schemeClr val="lt1"/>
-          </a:fontRef>
-        </p:style>
-        <p:txBody>
-          <a:bodyPr rtlCol="0" anchor="ctr"/>
-          <a:lstStyle/>
-          <a:p>
-            <a:pPr algn="ctr"/>
-          </a:p>
-        </p:txBody>
-      </p:sp>
-      <p:sp>
-        <p:nvSpPr>
-          <p:cNvPr id="11" name="TextBox 10"/>
-          <p:cNvSpPr txBox="1"/>
-          <p:nvPr/>
-        </p:nvSpPr>
-        <p:spPr>
-          <a:xfrm>
-            <a:off x="6400800" y="1664208"/>
-            <a:ext cx="5029200" cy="320040"/>
-          </a:xfrm>
-          <a:prstGeom prst="rect">
-            <a:avLst/>
-          </a:prstGeom>
-          <a:noFill/>
-        </p:spPr>
-        <p:txBody>
-          <a:bodyPr wrap="square">
-            <a:spAutoFit/>
-          </a:bodyPr>
-          <a:lstStyle/>
-          <a:p>
-            <a:pPr algn="l"/>
-            <a:r>
-              <a:rPr sz="1200" b="0">
-                <a:solidFill>
-                  <a:srgbClr val="2C3E50"/>
-                </a:solidFill>
-                <a:latin typeface="Microsoft YaHei"/>
-              </a:rPr>
-              <a:t>04. 教师查看课程学生（饼图+排行并排）</a:t>
-            </a:r>
-          </a:p>
-        </p:txBody>
-      </p:sp>
-      <p:sp>
-        <p:nvSpPr>
-          <p:cNvPr id="12" name="Rectangle 11"/>
-          <p:cNvSpPr/>
-          <p:nvPr/>
-        </p:nvSpPr>
-        <p:spPr>
-          <a:xfrm>
-            <a:off x="457200" y="2194560"/>
-            <a:ext cx="5486400" cy="457200"/>
-          </a:xfrm>
-          <a:prstGeom prst="rect">
-            <a:avLst/>
-          </a:prstGeom>
-          <a:solidFill>
-            <a:srgbClr val="EBF5FB"/>
-          </a:solidFill>
-          <a:ln>
-            <a:noFill/>
-          </a:ln>
-        </p:spPr>
-        <p:style>
-          <a:lnRef idx="1">
-            <a:schemeClr val="accent1"/>
-          </a:lnRef>
-          <a:fillRef idx="3">
-            <a:schemeClr val="accent1"/>
-          </a:fillRef>
-          <a:effectRef idx="2">
-            <a:schemeClr val="accent1"/>
-          </a:effectRef>
-          <a:fontRef idx="minor">
-            <a:schemeClr val="lt1"/>
-          </a:fontRef>
-        </p:style>
-        <p:txBody>
-          <a:bodyPr rtlCol="0" anchor="ctr"/>
-          <a:lstStyle/>
-          <a:p>
-            <a:pPr algn="ctr"/>
-          </a:p>
-        </p:txBody>
-      </p:sp>
-      <p:sp>
-        <p:nvSpPr>
-          <p:cNvPr id="13" name="TextBox 12"/>
-          <p:cNvSpPr txBox="1"/>
-          <p:nvPr/>
-        </p:nvSpPr>
-        <p:spPr>
-          <a:xfrm>
-            <a:off x="640080" y="2258568"/>
-            <a:ext cx="5029200" cy="320040"/>
-          </a:xfrm>
-          <a:prstGeom prst="rect">
-            <a:avLst/>
-          </a:prstGeom>
-          <a:noFill/>
-        </p:spPr>
-        <p:txBody>
-          <a:bodyPr wrap="square">
-            <a:spAutoFit/>
-          </a:bodyPr>
-          <a:lstStyle/>
-          <a:p>
-            <a:pPr algn="l"/>
-            <a:r>
-              <a:rPr sz="1200" b="0">
-                <a:solidFill>
-                  <a:srgbClr val="2C3E50"/>
-                </a:solidFill>
-                <a:latin typeface="Microsoft YaHei"/>
-              </a:rPr>
-              <a:t>05. 学生我的成绩（各科成绩柱状图+及格线）</a:t>
-            </a:r>
-          </a:p>
-        </p:txBody>
-      </p:sp>
-      <p:sp>
-        <p:nvSpPr>
-          <p:cNvPr id="14" name="Rectangle 13"/>
-          <p:cNvSpPr/>
-          <p:nvPr/>
-        </p:nvSpPr>
-        <p:spPr>
-          <a:xfrm>
-            <a:off x="6217920" y="2194560"/>
-            <a:ext cx="5486400" cy="457200"/>
-          </a:xfrm>
-          <a:prstGeom prst="rect">
-            <a:avLst/>
-          </a:prstGeom>
-          <a:solidFill>
-            <a:srgbClr val="EBF5FB"/>
-          </a:solidFill>
-          <a:ln>
-            <a:noFill/>
-          </a:ln>
-        </p:spPr>
-        <p:style>
-          <a:lnRef idx="1">
-            <a:schemeClr val="accent1"/>
-          </a:lnRef>
-          <a:fillRef idx="3">
-            <a:schemeClr val="accent1"/>
-          </a:fillRef>
-          <a:effectRef idx="2">
-            <a:schemeClr val="accent1"/>
-          </a:effectRef>
-          <a:fontRef idx="minor">
-            <a:schemeClr val="lt1"/>
-          </a:fontRef>
-        </p:style>
-        <p:txBody>
-          <a:bodyPr rtlCol="0" anchor="ctr"/>
-          <a:lstStyle/>
-          <a:p>
-            <a:pPr algn="ctr"/>
-          </a:p>
-        </p:txBody>
-      </p:sp>
-      <p:sp>
-        <p:nvSpPr>
-          <p:cNvPr id="15" name="TextBox 14"/>
-          <p:cNvSpPr txBox="1"/>
-          <p:nvPr/>
-        </p:nvSpPr>
-        <p:spPr>
-          <a:xfrm>
-            <a:off x="6400800" y="2258568"/>
-            <a:ext cx="5029200" cy="320040"/>
-          </a:xfrm>
-          <a:prstGeom prst="rect">
-            <a:avLst/>
-          </a:prstGeom>
-          <a:noFill/>
-        </p:spPr>
-        <p:txBody>
-          <a:bodyPr wrap="square">
-            <a:spAutoFit/>
-          </a:bodyPr>
-          <a:lstStyle/>
-          <a:p>
-            <a:pPr algn="l"/>
-            <a:r>
-              <a:rPr sz="1200" b="0">
-                <a:solidFill>
-                  <a:srgbClr val="2C3E50"/>
-                </a:solidFill>
-                <a:latin typeface="Microsoft YaHei"/>
-              </a:rPr>
-              <a:t>06. 排课管理（datetime_input 原生组件）</a:t>
-            </a:r>
-          </a:p>
-        </p:txBody>
-      </p:sp>
-      <p:sp>
-        <p:nvSpPr>
-          <p:cNvPr id="16" name="Rectangle 15"/>
-          <p:cNvSpPr/>
-          <p:nvPr/>
-        </p:nvSpPr>
-        <p:spPr>
-          <a:xfrm>
-            <a:off x="457200" y="2788920"/>
-            <a:ext cx="5486400" cy="457200"/>
-          </a:xfrm>
-          <a:prstGeom prst="rect">
-            <a:avLst/>
-          </a:prstGeom>
-          <a:solidFill>
-            <a:srgbClr val="EBF5FB"/>
-          </a:solidFill>
-          <a:ln>
-            <a:noFill/>
-          </a:ln>
-        </p:spPr>
-        <p:style>
-          <a:lnRef idx="1">
-            <a:schemeClr val="accent1"/>
-          </a:lnRef>
-          <a:fillRef idx="3">
-            <a:schemeClr val="accent1"/>
-          </a:fillRef>
-          <a:effectRef idx="2">
-            <a:schemeClr val="accent1"/>
-          </a:effectRef>
-          <a:fontRef idx="minor">
-            <a:schemeClr val="lt1"/>
-          </a:fontRef>
-        </p:style>
-        <p:txBody>
-          <a:bodyPr rtlCol="0" anchor="ctr"/>
-          <a:lstStyle/>
-          <a:p>
-            <a:pPr algn="ctr"/>
-          </a:p>
-        </p:txBody>
-      </p:sp>
-      <p:sp>
-        <p:nvSpPr>
-          <p:cNvPr id="17" name="TextBox 16"/>
-          <p:cNvSpPr txBox="1"/>
-          <p:nvPr/>
-        </p:nvSpPr>
-        <p:spPr>
-          <a:xfrm>
-            <a:off x="640080" y="2852928"/>
-            <a:ext cx="5029200" cy="320040"/>
-          </a:xfrm>
-          <a:prstGeom prst="rect">
-            <a:avLst/>
-          </a:prstGeom>
-          <a:noFill/>
-        </p:spPr>
-        <p:txBody>
-          <a:bodyPr wrap="square">
-            <a:spAutoFit/>
-          </a:bodyPr>
-          <a:lstStyle/>
-          <a:p>
-            <a:pPr algn="l"/>
-            <a:r>
-              <a:rPr sz="1200" b="0">
-                <a:solidFill>
-                  <a:srgbClr val="2C3E50"/>
-                </a:solidFill>
-                <a:latin typeface="Microsoft YaHei"/>
-              </a:rPr>
-              <a:t>07. 班级成绩统计（分布柱状图）</a:t>
-            </a:r>
-          </a:p>
-        </p:txBody>
-      </p:sp>
-      <p:sp>
-        <p:nvSpPr>
-          <p:cNvPr id="18" name="Rectangle 17"/>
-          <p:cNvSpPr/>
-          <p:nvPr/>
-        </p:nvSpPr>
-        <p:spPr>
-          <a:xfrm>
-            <a:off x="6217920" y="2788920"/>
-            <a:ext cx="5486400" cy="457200"/>
-          </a:xfrm>
-          <a:prstGeom prst="rect">
-            <a:avLst/>
-          </a:prstGeom>
-          <a:solidFill>
-            <a:srgbClr val="EBF5FB"/>
-          </a:solidFill>
-          <a:ln>
-            <a:noFill/>
-          </a:ln>
-        </p:spPr>
-        <p:style>
-          <a:lnRef idx="1">
-            <a:schemeClr val="accent1"/>
-          </a:lnRef>
-          <a:fillRef idx="3">
-            <a:schemeClr val="accent1"/>
-          </a:fillRef>
-          <a:effectRef idx="2">
-            <a:schemeClr val="accent1"/>
-          </a:effectRef>
-          <a:fontRef idx="minor">
-            <a:schemeClr val="lt1"/>
-          </a:fontRef>
-        </p:style>
-        <p:txBody>
-          <a:bodyPr rtlCol="0" anchor="ctr"/>
-          <a:lstStyle/>
-          <a:p>
-            <a:pPr algn="ctr"/>
-          </a:p>
-        </p:txBody>
-      </p:sp>
-      <p:sp>
-        <p:nvSpPr>
-          <p:cNvPr id="19" name="TextBox 18"/>
-          <p:cNvSpPr txBox="1"/>
-          <p:nvPr/>
-        </p:nvSpPr>
-        <p:spPr>
-          <a:xfrm>
-            <a:off x="6400800" y="2852928"/>
-            <a:ext cx="5029200" cy="320040"/>
-          </a:xfrm>
-          <a:prstGeom prst="rect">
-            <a:avLst/>
-          </a:prstGeom>
-          <a:noFill/>
-        </p:spPr>
-        <p:txBody>
-          <a:bodyPr wrap="square">
-            <a:spAutoFit/>
-          </a:bodyPr>
-          <a:lstStyle/>
-          <a:p>
-            <a:pPr algn="l"/>
-            <a:r>
-              <a:rPr sz="1200" b="0">
-                <a:solidFill>
-                  <a:srgbClr val="2C3E50"/>
-                </a:solidFill>
-                <a:latin typeface="Microsoft YaHei"/>
-              </a:rPr>
-              <a:t>08. 选课管理（按学号+学期查询）</a:t>
-            </a:r>
-          </a:p>
-        </p:txBody>
-      </p:sp>
-      <p:sp>
-        <p:nvSpPr>
-          <p:cNvPr id="20" name="Rectangle 19"/>
-          <p:cNvSpPr/>
-          <p:nvPr/>
-        </p:nvSpPr>
-        <p:spPr>
-          <a:xfrm>
-            <a:off x="457200" y="3383280"/>
-            <a:ext cx="5486400" cy="457200"/>
-          </a:xfrm>
-          <a:prstGeom prst="rect">
-            <a:avLst/>
-          </a:prstGeom>
-          <a:solidFill>
-            <a:srgbClr val="EBF5FB"/>
-          </a:solidFill>
-          <a:ln>
-            <a:noFill/>
-          </a:ln>
-        </p:spPr>
-        <p:style>
-          <a:lnRef idx="1">
-            <a:schemeClr val="accent1"/>
-          </a:lnRef>
-          <a:fillRef idx="3">
-            <a:schemeClr val="accent1"/>
-          </a:fillRef>
-          <a:effectRef idx="2">
-            <a:schemeClr val="accent1"/>
-          </a:effectRef>
-          <a:fontRef idx="minor">
-            <a:schemeClr val="lt1"/>
-          </a:fontRef>
-        </p:style>
-        <p:txBody>
-          <a:bodyPr rtlCol="0" anchor="ctr"/>
-          <a:lstStyle/>
-          <a:p>
-            <a:pPr algn="ctr"/>
-          </a:p>
-        </p:txBody>
-      </p:sp>
-      <p:sp>
-        <p:nvSpPr>
-          <p:cNvPr id="21" name="TextBox 20"/>
-          <p:cNvSpPr txBox="1"/>
-          <p:nvPr/>
-        </p:nvSpPr>
-        <p:spPr>
-          <a:xfrm>
-            <a:off x="640080" y="3447288"/>
-            <a:ext cx="5029200" cy="320040"/>
-          </a:xfrm>
-          <a:prstGeom prst="rect">
-            <a:avLst/>
-          </a:prstGeom>
-          <a:noFill/>
-        </p:spPr>
-        <p:txBody>
-          <a:bodyPr wrap="square">
-            <a:spAutoFit/>
-          </a:bodyPr>
-          <a:lstStyle/>
-          <a:p>
-            <a:pPr algn="l"/>
-            <a:r>
-              <a:rPr sz="1200" b="0">
-                <a:solidFill>
-                  <a:srgbClr val="2C3E50"/>
-                </a:solidFill>
-                <a:latin typeface="Microsoft YaHei"/>
-              </a:rPr>
-              <a:t>09. 专业管理页面</a:t>
-            </a:r>
-          </a:p>
-        </p:txBody>
-      </p:sp>
-      <p:sp>
-        <p:nvSpPr>
-          <p:cNvPr id="22" name="Rectangle 21"/>
-          <p:cNvSpPr/>
-          <p:nvPr/>
-        </p:nvSpPr>
-        <p:spPr>
-          <a:xfrm>
-            <a:off x="6217920" y="3383280"/>
-            <a:ext cx="5486400" cy="457200"/>
-          </a:xfrm>
-          <a:prstGeom prst="rect">
-            <a:avLst/>
-          </a:prstGeom>
-          <a:solidFill>
-            <a:srgbClr val="EBF5FB"/>
-          </a:solidFill>
-          <a:ln>
-            <a:noFill/>
-          </a:ln>
-        </p:spPr>
-        <p:style>
-          <a:lnRef idx="1">
-            <a:schemeClr val="accent1"/>
-          </a:lnRef>
-          <a:fillRef idx="3">
-            <a:schemeClr val="accent1"/>
-          </a:fillRef>
-          <a:effectRef idx="2">
-            <a:schemeClr val="accent1"/>
-          </a:effectRef>
-          <a:fontRef idx="minor">
-            <a:schemeClr val="lt1"/>
-          </a:fontRef>
-        </p:style>
-        <p:txBody>
-          <a:bodyPr rtlCol="0" anchor="ctr"/>
-          <a:lstStyle/>
-          <a:p>
-            <a:pPr algn="ctr"/>
-          </a:p>
-        </p:txBody>
-      </p:sp>
-      <p:sp>
-        <p:nvSpPr>
-          <p:cNvPr id="23" name="TextBox 22"/>
-          <p:cNvSpPr txBox="1"/>
-          <p:nvPr/>
-        </p:nvSpPr>
-        <p:spPr>
-          <a:xfrm>
-            <a:off x="6400800" y="3447288"/>
-            <a:ext cx="5029200" cy="320040"/>
-          </a:xfrm>
-          <a:prstGeom prst="rect">
-            <a:avLst/>
-          </a:prstGeom>
-          <a:noFill/>
-        </p:spPr>
-        <p:txBody>
-          <a:bodyPr wrap="square">
-            <a:spAutoFit/>
-          </a:bodyPr>
-          <a:lstStyle/>
-          <a:p>
-            <a:pPr algn="l"/>
-            <a:r>
-              <a:rPr sz="1200" b="0">
-                <a:solidFill>
-                  <a:srgbClr val="2C3E50"/>
-                </a:solidFill>
-                <a:latin typeface="Microsoft YaHei"/>
-              </a:rPr>
-              <a:t>10. 生成器运行效果（200 万数据导入）</a:t>
-            </a:r>
-          </a:p>
-        </p:txBody>
-      </p:sp>
-    </p:spTree>
-  </p:cSld>
-  <p:clrMapOvr>
-    <a:masterClrMapping/>
-  </p:clrMapOvr>
-</p:sld>
-</file>
-
 <file path=ppt/slides/slide2.xml><?xml version="1.0" encoding="utf-8"?>
 <p:sld xmlns:a="http://schemas.openxmlformats.org/drawingml/2006/main" xmlns:p="http://schemas.openxmlformats.org/presentationml/2006/main" xmlns:r="http://schemas.openxmlformats.org/officeDocument/2006/relationships">
   <p:cSld>
@@ -7504,7 +6627,7 @@
                 </a:solidFill>
                 <a:latin typeface="Microsoft YaHei"/>
               </a:rPr>
-              <a:t>⚠️ 当前截图待补充：请替换为实际系统运行截图</a:t>
+              <a:t>📌 数据量 20,000 学生 / 300 教师 / 329 班级 / 200 万选课</a:t>
             </a:r>
           </a:p>
         </p:txBody>
@@ -8898,7 +8021,7 @@
                 </a:solidFill>
                 <a:latin typeface="Microsoft YaHei"/>
               </a:rPr>
-              <a:t>⚠️ 待补充：系统部署架构图截图</a:t>
+              <a:t>📌 支持命令行 (CLI) + Web (Streamlit) 双界面运行</a:t>
             </a:r>
           </a:p>
         </p:txBody>
